--- a/docs/RAD-SMART_Phase2_Submission.pptx
+++ b/docs/RAD-SMART_Phase2_Submission.pptx
@@ -23092,7 +23092,7 @@
                 </a:solidFill>
                 <a:latin typeface="Arial"/>
               </a:rPr>
-              <a:t>DEMO VIDEO · 3½ MIN, NARRATED</a:t>
+              <a:t>DEMO VIDEO · 3¾ MIN, NARRATED</a:t>
             </a:r>
           </a:p>
           <a:p>

--- a/docs/RAD-SMART_Phase2_Submission.pptx
+++ b/docs/RAD-SMART_Phase2_Submission.pptx
@@ -13382,7 +13382,7 @@
                 </a:solidFill>
                 <a:latin typeface="Calibri"/>
               </a:rPr>
-              <a:t>Installs as a CARE plugin on the hospital's own server; about ₹1 a message to run</a:t>
+              <a:t>Live on Microsoft Azure today; the pilot runs the same Docker image; about ₹1 a message to run</a:t>
             </a:r>
           </a:p>
         </p:txBody>
@@ -13431,7 +13431,7 @@
                 </a:solidFill>
                 <a:latin typeface="Arial"/>
               </a:rPr>
-              <a:t>WHAT A PILOT NEEDS</a:t>
+              <a:t>RUNNING TODAY, AND WHAT A PILOT NEEDS</a:t>
             </a:r>
           </a:p>
           <a:p>
@@ -13449,13 +13449,55 @@
               <a:buChar char="•"/>
             </a:pPr>
             <a:r>
+              <a:rPr sz="1200" b="1" i="0">
+                <a:solidFill>
+                  <a:srgbClr val="232F3E"/>
+                </a:solidFill>
+                <a:latin typeface="Calibri"/>
+              </a:rPr>
+              <a:t>Live now:</a:t>
+            </a:r>
+            <a:r>
               <a:rPr sz="1200" b="0" i="0">
                 <a:solidFill>
                   <a:srgbClr val="232F3E"/>
                 </a:solidFill>
                 <a:latin typeface="Calibri"/>
               </a:rPr>
-              <a:t>A CARE instance (the hospital's, or a VM running CARE with Docker Compose); RAD-SMART installs as a backend and a frontend plugin</a:t>
+              <a:t> one Docker image (CARE's production build with both plugins) on Azure Container Apps, with PostgreSQL, daily backups and HTTPS; one script deploys it</a:t>
+            </a:r>
+          </a:p>
+          <a:p>
+            <a:pPr algn="l" marL="155448" indent="-155448">
+              <a:lnSpc>
+                <a:spcPct val="100000"/>
+              </a:lnSpc>
+              <a:spcAft>
+                <a:spcPts val="300"/>
+              </a:spcAft>
+              <a:buClr>
+                <a:srgbClr val="1F3DA9"/>
+              </a:buClr>
+              <a:buFont typeface="Arial"/>
+              <a:buChar char="•"/>
+            </a:pPr>
+            <a:r>
+              <a:rPr sz="1200" b="1" i="0">
+                <a:solidFill>
+                  <a:srgbClr val="232F3E"/>
+                </a:solidFill>
+                <a:latin typeface="Calibri"/>
+              </a:rPr>
+              <a:t>Pilot:</a:t>
+            </a:r>
+            <a:r>
+              <a:rPr sz="1200" b="0" i="0">
+                <a:solidFill>
+                  <a:srgbClr val="232F3E"/>
+                </a:solidFill>
+                <a:latin typeface="Calibri"/>
+              </a:rPr>
+              <a:t> the same image with demonstration mode off, on the hospital's server beside its CARE, or in Azure Central India so data stays in India</a:t>
             </a:r>
           </a:p>
           <a:p>
@@ -13664,7 +13706,7 @@
                 <a:gridCol w="4416552"/>
                 <a:gridCol w="1417320"/>
               </a:tblGrid>
-              <a:tr h="315883">
+              <a:tr h="289560">
                 <a:tc>
                   <a:txBody>
                     <a:bodyPr wrap="square"/>
@@ -13712,7 +13754,7 @@
                   </a:tcPr>
                 </a:tc>
               </a:tr>
-              <a:tr h="315883">
+              <a:tr h="289560">
                 <a:tc gridSpan="2">
                   <a:txBody>
                     <a:bodyPr wrap="square"/>
@@ -13745,7 +13787,7 @@
                   <a:tcPr/>
                 </a:tc>
               </a:tr>
-              <a:tr h="315883">
+              <a:tr h="289560">
                 <a:tc>
                   <a:txBody>
                     <a:bodyPr wrap="square"/>
@@ -13793,7 +13835,7 @@
                   </a:tcPr>
                 </a:tc>
               </a:tr>
-              <a:tr h="315883">
+              <a:tr h="289560">
                 <a:tc>
                   <a:txBody>
                     <a:bodyPr wrap="square"/>
@@ -13841,7 +13883,7 @@
                   </a:tcPr>
                 </a:tc>
               </a:tr>
-              <a:tr h="315883">
+              <a:tr h="289560">
                 <a:tc>
                   <a:txBody>
                     <a:bodyPr wrap="square"/>
@@ -13889,7 +13931,7 @@
                   </a:tcPr>
                 </a:tc>
               </a:tr>
-              <a:tr h="315883">
+              <a:tr h="289560">
                 <a:tc>
                   <a:txBody>
                     <a:bodyPr wrap="square"/>
@@ -13937,7 +13979,7 @@
                   </a:tcPr>
                 </a:tc>
               </a:tr>
-              <a:tr h="315883">
+              <a:tr h="289560">
                 <a:tc gridSpan="2">
                   <a:txBody>
                     <a:bodyPr wrap="square"/>
@@ -13970,7 +14012,7 @@
                   <a:tcPr/>
                 </a:tc>
               </a:tr>
-              <a:tr h="315883">
+              <a:tr h="289560">
                 <a:tc>
                   <a:txBody>
                     <a:bodyPr wrap="square"/>
@@ -14018,7 +14060,7 @@
                   </a:tcPr>
                 </a:tc>
               </a:tr>
-              <a:tr h="315883">
+              <a:tr h="289560">
                 <a:tc>
                   <a:txBody>
                     <a:bodyPr wrap="square"/>
@@ -14066,7 +14108,7 @@
                   </a:tcPr>
                 </a:tc>
               </a:tr>
-              <a:tr h="315883">
+              <a:tr h="289560">
                 <a:tc>
                   <a:txBody>
                     <a:bodyPr wrap="square"/>
@@ -14114,7 +14156,7 @@
                   </a:tcPr>
                 </a:tc>
               </a:tr>
-              <a:tr h="315890">
+              <a:tr h="289560">
                 <a:tc>
                   <a:txBody>
                     <a:bodyPr wrap="square"/>
@@ -14162,6 +14204,54 @@
                   </a:tcPr>
                 </a:tc>
               </a:tr>
+              <a:tr h="289560">
+                <a:tc>
+                  <a:txBody>
+                    <a:bodyPr wrap="square"/>
+                    <a:lstStyle/>
+                    <a:p>
+                      <a:pPr algn="l"/>
+                      <a:r>
+                        <a:rPr sz="1150" b="0" i="0">
+                          <a:solidFill>
+                            <a:srgbClr val="232F3E"/>
+                          </a:solidFill>
+                          <a:latin typeface="Calibri"/>
+                        </a:rPr>
+                        <a:t>Or Azure in India instead of a server, per month</a:t>
+                      </a:r>
+                    </a:p>
+                  </a:txBody>
+                  <a:tcPr marL="91440" marR="91440" marT="36576" marB="36576" anchor="ctr">
+                    <a:solidFill>
+                      <a:srgbClr val="FFFFFF"/>
+                    </a:solidFill>
+                  </a:tcPr>
+                </a:tc>
+                <a:tc>
+                  <a:txBody>
+                    <a:bodyPr wrap="square"/>
+                    <a:lstStyle/>
+                    <a:p>
+                      <a:pPr algn="r"/>
+                      <a:r>
+                        <a:rPr sz="1150" b="1" i="0">
+                          <a:solidFill>
+                            <a:srgbClr val="232F3E"/>
+                          </a:solidFill>
+                          <a:latin typeface="Calibri"/>
+                        </a:rPr>
+                        <a:t>about 4,000 – 6,000</a:t>
+                      </a:r>
+                    </a:p>
+                  </a:txBody>
+                  <a:tcPr marL="91440" marR="91440" marT="36576" marB="36576" anchor="ctr">
+                    <a:solidFill>
+                      <a:srgbClr val="FFFFFF"/>
+                    </a:solidFill>
+                  </a:tcPr>
+                </a:tc>
+              </a:tr>
             </a:tbl>
           </a:graphicData>
         </a:graphic>
@@ -16434,7 +16524,7 @@
                 </a:solidFill>
                 <a:latin typeface="Calibri"/>
               </a:rPr>
-              <a:t>20 automated safety tests now guard all of this</a:t>
+              <a:t>30 automated tests now guard all of this</a:t>
             </a:r>
           </a:p>
         </p:txBody>
@@ -22723,7 +22813,7 @@
                 </a:solidFill>
                 <a:latin typeface="Calibri"/>
               </a:rPr>
-              <a:t>A working application inside CARE today, shown here with synthetic patients</a:t>
+              <a:t>A working application inside CARE, live on Microsoft Azure, shown here with synthetic patients</a:t>
             </a:r>
           </a:p>
         </p:txBody>
@@ -23151,6 +23241,26 @@
                 <a:latin typeface="Calibri"/>
                 <a:hlinkClick r:id="rId9"/>
               </a:rPr>
+              <a:t>Try the live app on Microsoft Azure</a:t>
+            </a:r>
+          </a:p>
+          <a:p>
+            <a:pPr algn="l">
+              <a:lnSpc>
+                <a:spcPct val="100000"/>
+              </a:lnSpc>
+              <a:spcAft>
+                <a:spcPts val="300"/>
+              </a:spcAft>
+            </a:pPr>
+            <a:r>
+              <a:rPr sz="1200" b="0" i="0">
+                <a:solidFill>
+                  <a:srgbClr val="1F3DA9"/>
+                </a:solidFill>
+                <a:latin typeface="Calibri"/>
+                <a:hlinkClick r:id="rId10"/>
+              </a:rPr>
               <a:t>Code on GitHub</a:t>
             </a:r>
           </a:p>
@@ -23165,7 +23275,7 @@
           <p:nvPr/>
         </p:nvPicPr>
         <p:blipFill>
-          <a:blip r:embed="rId10"/>
+          <a:blip r:embed="rId11"/>
           <a:stretch>
             <a:fillRect/>
           </a:stretch>
@@ -24650,7 +24760,7 @@
                 </a:solidFill>
                 <a:latin typeface="Calibri"/>
               </a:rPr>
-              <a:t>Docker Compose · about 10,600 lines of code</a:t>
+              <a:t>Docker, live on Microsoft Azure · about 11,000 lines of code</a:t>
             </a:r>
           </a:p>
         </p:txBody>
@@ -24852,7 +24962,7 @@
                 </a:solidFill>
                 <a:latin typeface="Calibri"/>
               </a:rPr>
-              <a:t>From a Round 1 engine to a working CARE application with a patient side (sprint: 5 Oct – 8 Nov)</a:t>
+              <a:t>From a Round 1 engine to a CARE application with a patient side, live on Azure (sprint: 5 Oct – 8 Nov)</a:t>
             </a:r>
           </a:p>
         </p:txBody>
@@ -25274,14 +25384,14 @@
                 </a:solidFill>
                 <a:latin typeface="Arial"/>
               </a:rPr>
-              <a:t>21 Oct</a:t>
-            </a:r>
-          </a:p>
-        </p:txBody>
-      </p:sp>
-      <p:sp>
-        <p:nvSpPr>
-          <p:cNvPr id="162" name="Milestone 21 Oct"/>
+              <a:t>24 Oct</a:t>
+            </a:r>
+          </a:p>
+        </p:txBody>
+      </p:sp>
+      <p:sp>
+        <p:nvSpPr>
+          <p:cNvPr id="162" name="Milestone 24 Oct"/>
           <p:cNvSpPr/>
           <p:nvPr/>
         </p:nvSpPr>
@@ -25347,7 +25457,7 @@
                 </a:solidFill>
                 <a:latin typeface="Calibri"/>
               </a:rPr>
-              <a:t>Technical guide and maths notes for the department</a:t>
+              <a:t>Department's second answers built in; a working app inside CARE</a:t>
             </a:r>
           </a:p>
         </p:txBody>
@@ -25389,14 +25499,14 @@
                 </a:solidFill>
                 <a:latin typeface="Arial"/>
               </a:rPr>
-              <a:t>24 Oct</a:t>
-            </a:r>
-          </a:p>
-        </p:txBody>
-      </p:sp>
-      <p:sp>
-        <p:nvSpPr>
-          <p:cNvPr id="165" name="Milestone 24 Oct"/>
+              <a:t>25 Oct</a:t>
+            </a:r>
+          </a:p>
+        </p:txBody>
+      </p:sp>
+      <p:sp>
+        <p:nvSpPr>
+          <p:cNvPr id="165" name="Milestone 25 Oct"/>
           <p:cNvSpPr/>
           <p:nvPr/>
         </p:nvSpPr>
@@ -25462,7 +25572,7 @@
                 </a:solidFill>
                 <a:latin typeface="Calibri"/>
               </a:rPr>
-              <a:t>Department's second answers built in; a working app inside CARE</a:t>
+              <a:t>Sarvam AI layer, patient page, QR check-in, evaluation, narrated video</a:t>
             </a:r>
           </a:p>
         </p:txBody>
@@ -25504,14 +25614,14 @@
                 </a:solidFill>
                 <a:latin typeface="Arial"/>
               </a:rPr>
-              <a:t>25 Oct</a:t>
-            </a:r>
-          </a:p>
-        </p:txBody>
-      </p:sp>
-      <p:sp>
-        <p:nvSpPr>
-          <p:cNvPr id="168" name="Milestone 25 Oct"/>
+              <a:t>26 Oct</a:t>
+            </a:r>
+          </a:p>
+        </p:txBody>
+      </p:sp>
+      <p:sp>
+        <p:nvSpPr>
+          <p:cNvPr id="168" name="Milestone 26 Oct"/>
           <p:cNvSpPr/>
           <p:nvPr/>
         </p:nvSpPr>
@@ -25577,7 +25687,7 @@
                 </a:solidFill>
                 <a:latin typeface="Calibri"/>
               </a:rPr>
-              <a:t>Sarvam AI layer, patient page, QR check-in, evaluation, narrated video</a:t>
+              <a:t>Live on Microsoft Azure in Docker, open to anyone; video recorded on it</a:t>
             </a:r>
           </a:p>
         </p:txBody>
@@ -25933,7 +26043,31 @@
                 </a:solidFill>
                 <a:latin typeface="Calibri"/>
               </a:rPr>
-              <a:t>Insights · 20 automated safety tests</a:t>
+              <a:t>Insights · 30 automated tests</a:t>
+            </a:r>
+          </a:p>
+          <a:p>
+            <a:pPr algn="l" marL="155448" indent="-155448">
+              <a:lnSpc>
+                <a:spcPct val="100000"/>
+              </a:lnSpc>
+              <a:spcAft>
+                <a:spcPts val="300"/>
+              </a:spcAft>
+              <a:buClr>
+                <a:srgbClr val="0D8743"/>
+              </a:buClr>
+              <a:buFont typeface="Arial"/>
+              <a:buChar char="•"/>
+            </a:pPr>
+            <a:r>
+              <a:rPr sz="1200" b="0" i="0">
+                <a:solidFill>
+                  <a:srgbClr val="232F3E"/>
+                </a:solidFill>
+                <a:latin typeface="Calibri"/>
+              </a:rPr>
+              <a:t>Live on Microsoft Azure in one Docker image; anyone can try it</a:t>
             </a:r>
           </a:p>
         </p:txBody>

--- a/docs/RAD-SMART_Phase2_Submission.pptx
+++ b/docs/RAD-SMART_Phase2_Submission.pptx
@@ -13180,7 +13180,7 @@
                 </a:solidFill>
                 <a:latin typeface="Calibri"/>
               </a:rPr>
-              <a:t>Patients can ask for another daily time from the page; staff decide</a:t>
+              <a:t>Patients can ask for the morning, afternoon or evening; staff agree any change with them</a:t>
             </a:r>
           </a:p>
         </p:txBody>
@@ -16524,7 +16524,7 @@
                 </a:solidFill>
                 <a:latin typeface="Calibri"/>
               </a:rPr>
-              <a:t>30 automated tests now guard all of this</a:t>
+              <a:t>45 automated tests now guard all of this</a:t>
             </a:r>
           </a:p>
         </p:txBody>
@@ -22121,7 +22121,7 @@
                 </a:solidFill>
                 <a:latin typeface="Calibri"/>
               </a:rPr>
-              <a:t>Arrival, in room, out, and a live check of 9 hard rules</a:t>
+              <a:t>Call next, late patients, out of turn; 9 hard rules checked</a:t>
             </a:r>
           </a:p>
         </p:txBody>
@@ -22196,7 +22196,7 @@
       </p:sp>
       <p:sp>
         <p:nvSpPr>
-          <p:cNvPr id="149" name="Feature: Requests"/>
+          <p:cNvPr id="149" name="Feature: Preferred time"/>
           <p:cNvSpPr/>
           <p:nvPr/>
         </p:nvSpPr>
@@ -22238,7 +22238,7 @@
                 </a:solidFill>
                 <a:latin typeface="Arial"/>
               </a:rPr>
-              <a:t>Requests</a:t>
+              <a:t>Preferred time</a:t>
             </a:r>
           </a:p>
           <a:p>
@@ -22257,7 +22257,7 @@
                 </a:solidFill>
                 <a:latin typeface="Calibri"/>
               </a:rPr>
-              <a:t>Patients ask for another daily time; staff decide</a:t>
+              <a:t>Morning, afternoon or evening; a better slot offered as one frees</a:t>
             </a:r>
           </a:p>
         </p:txBody>
@@ -25899,7 +25899,7 @@
                 </a:solidFill>
                 <a:latin typeface="Calibri"/>
               </a:rPr>
-              <a:t>Day board: arrival, in room, out, live rule check</a:t>
+              <a:t>Day board: live queue, out of turn for late patients, rule check</a:t>
             </a:r>
           </a:p>
           <a:p>
@@ -25947,7 +25947,7 @@
                 </a:solidFill>
                 <a:latin typeface="Calibri"/>
               </a:rPr>
-              <a:t>Requests for another time, decided by staff</a:t>
+              <a:t>Preferred part of the day; better times offered, agreed by staff</a:t>
             </a:r>
           </a:p>
           <a:p>
@@ -26043,7 +26043,7 @@
                 </a:solidFill>
                 <a:latin typeface="Calibri"/>
               </a:rPr>
-              <a:t>Insights · 30 automated tests</a:t>
+              <a:t>Insights · 45 automated tests</a:t>
             </a:r>
           </a:p>
           <a:p>
@@ -26191,6 +26191,34 @@
                 </a:solidFill>
                 <a:latin typeface="Calibri"/>
               </a:rPr>
+              <a:t>From clinical feedback:</a:t>
+            </a:r>
+            <a:r>
+              <a:rPr sz="1200" b="0" i="0">
+                <a:solidFill>
+                  <a:srgbClr val="232F3E"/>
+                </a:solidFill>
+                <a:latin typeface="Calibri"/>
+              </a:rPr>
+              <a:t> morning, afternoon or evening; a late patient's turn goes to whoever is ready.</a:t>
+            </a:r>
+          </a:p>
+          <a:p>
+            <a:pPr algn="l">
+              <a:lnSpc>
+                <a:spcPct val="100000"/>
+              </a:lnSpc>
+              <a:spcAft>
+                <a:spcPts val="600"/>
+              </a:spcAft>
+            </a:pPr>
+            <a:r>
+              <a:rPr sz="1200" b="1" i="0">
+                <a:solidFill>
+                  <a:srgbClr val="232F3E"/>
+                </a:solidFill>
+                <a:latin typeface="Calibri"/>
+              </a:rPr>
               <a:t>Challenges found in testing, fixed:</a:t>
             </a:r>
             <a:r>
@@ -26200,7 +26228,7 @@
                 </a:solidFill>
                 <a:latin typeface="Calibri"/>
               </a:rPr>
-              <a:t> Kannada attaches suffixes to times; Konkani turned "the next working day" into "next week", so messages now name the date; an explanation used the proposed time; one patient button was unclear.</a:t>
+              <a:t> Kannada suffixes on times; Konkani's "next week" (messages now name the date); an explanation using the proposed time; an unclear button.</a:t>
             </a:r>
           </a:p>
         </p:txBody>
